--- a/MuleSoft_AI_MCP_Bridge.pptx
+++ b/MuleSoft_AI_MCP_Bridge.pptx
@@ -1783,6 +1783,82 @@
           </a:prstGeom>
         </p:spPr>
       </p:pic>
+      <p:sp>
+        <p:nvSpPr>
+          <p:cNvPr id="5" name="CaixaDeTexto 4">
+            <a:extLst>
+              <a:ext uri="{FF2B5EF4-FFF2-40B4-BE49-F238E27FC236}">
+                <a16:creationId xmlns:a16="http://schemas.microsoft.com/office/drawing/2014/main" id="{732445CE-4301-3711-0153-13A9AADAA0B2}"/>
+              </a:ext>
+            </a:extLst>
+          </p:cNvPr>
+          <p:cNvSpPr txBox="1"/>
+          <p:nvPr/>
+        </p:nvSpPr>
+        <p:spPr>
+          <a:xfrm>
+            <a:off x="830292" y="3725983"/>
+            <a:ext cx="5691278" cy="1200329"/>
+          </a:xfrm>
+          <a:prstGeom prst="rect">
+            <a:avLst/>
+          </a:prstGeom>
+        </p:spPr>
+        <p:style>
+          <a:lnRef idx="1">
+            <a:schemeClr val="accent1"/>
+          </a:lnRef>
+          <a:fillRef idx="2">
+            <a:schemeClr val="accent1"/>
+          </a:fillRef>
+          <a:effectRef idx="1">
+            <a:schemeClr val="accent1"/>
+          </a:effectRef>
+          <a:fontRef idx="minor">
+            <a:schemeClr val="dk1"/>
+          </a:fontRef>
+        </p:style>
+        <p:txBody>
+          <a:bodyPr wrap="square">
+            <a:spAutoFit/>
+          </a:bodyPr>
+          <a:lstStyle/>
+          <a:p>
+            <a:pPr>
+              <a:buNone/>
+            </a:pPr>
+            <a:r>
+              <a:rPr lang="pt-BR" b="1" dirty="0"/>
+              <a:t>📚 Material de Apoio</a:t>
+            </a:r>
+          </a:p>
+          <a:p>
+            <a:pPr>
+              <a:buNone/>
+            </a:pPr>
+            <a:r>
+              <a:rPr lang="pt-BR" dirty="0"/>
+              <a:t>Exemplos práticos, código-fonte e instruções para testes e aprendizado.</a:t>
+            </a:r>
+          </a:p>
+          <a:p>
+            <a:pPr>
+              <a:buNone/>
+            </a:pPr>
+            <a:r>
+              <a:rPr lang="pt-BR" dirty="0"/>
+              <a:t>🔗 </a:t>
+            </a:r>
+            <a:r>
+              <a:rPr lang="pt-BR" dirty="0">
+                <a:hlinkClick r:id="rId3"/>
+              </a:rPr>
+              <a:t>GitHub – MCP Demo Clientes CRUD</a:t>
+            </a:r>
+            <a:endParaRPr lang="pt-BR" dirty="0"/>
+          </a:p>
+        </p:txBody>
+      </p:sp>
     </p:spTree>
     <p:extLst>
       <p:ext uri="{BB962C8B-B14F-4D97-AF65-F5344CB8AC3E}">

--- a/MuleSoft_AI_MCP_Bridge.pptx
+++ b/MuleSoft_AI_MCP_Bridge.pptx
@@ -1798,7 +1798,7 @@
         <p:spPr>
           <a:xfrm>
             <a:off x="830292" y="3725983"/>
-            <a:ext cx="5691278" cy="1200329"/>
+            <a:ext cx="5691278" cy="1477328"/>
           </a:xfrm>
           <a:prstGeom prst="rect">
             <a:avLst/>
@@ -1854,6 +1854,22 @@
                 <a:hlinkClick r:id="rId3"/>
               </a:rPr>
               <a:t>GitHub – MCP Demo Clientes CRUD</a:t>
+            </a:r>
+            <a:endParaRPr lang="pt-BR" dirty="0"/>
+          </a:p>
+          <a:p>
+            <a:pPr>
+              <a:buNone/>
+            </a:pPr>
+            <a:r>
+              <a:rPr lang="pt-BR" dirty="0"/>
+              <a:t>🔗 </a:t>
+            </a:r>
+            <a:r>
+              <a:rPr lang="pt-BR" dirty="0">
+                <a:hlinkClick r:id="rId4"/>
+              </a:rPr>
+              <a:t>GitHub – MCP Bridge Passo a Passo</a:t>
             </a:r>
             <a:endParaRPr lang="pt-BR" dirty="0"/>
           </a:p>
